--- a/ゲーム科2年/00_前期/ゲーム開発Ⅰ/ゲーム物理学/座学/10_2次導関数と瞬間加速度.pptx
+++ b/ゲーム科2年/00_前期/ゲーム開発Ⅰ/ゲーム物理学/座学/10_2次導関数と瞬間加速度.pptx
@@ -2721,7 +2721,7 @@
           <a:p>
             <a:fld id="{E9CC885B-4903-4D54-9A93-00025F12DED9}" type="datetimeFigureOut">
               <a:rPr kumimoji="1" lang="ja-JP" altLang="en-US" smtClean="0"/>
-              <a:t>2024/12/17</a:t>
+              <a:t>2025/3/5</a:t>
             </a:fld>
             <a:endParaRPr kumimoji="1" lang="ja-JP" altLang="en-US"/>
           </a:p>
@@ -2951,7 +2951,7 @@
           <a:p>
             <a:fld id="{E9CC885B-4903-4D54-9A93-00025F12DED9}" type="datetimeFigureOut">
               <a:rPr kumimoji="1" lang="ja-JP" altLang="en-US" smtClean="0"/>
-              <a:t>2024/12/17</a:t>
+              <a:t>2025/3/5</a:t>
             </a:fld>
             <a:endParaRPr kumimoji="1" lang="ja-JP" altLang="en-US"/>
           </a:p>
@@ -3191,7 +3191,7 @@
           <a:p>
             <a:fld id="{E9CC885B-4903-4D54-9A93-00025F12DED9}" type="datetimeFigureOut">
               <a:rPr kumimoji="1" lang="ja-JP" altLang="en-US" smtClean="0"/>
-              <a:t>2024/12/17</a:t>
+              <a:t>2025/3/5</a:t>
             </a:fld>
             <a:endParaRPr kumimoji="1" lang="ja-JP" altLang="en-US"/>
           </a:p>
@@ -3421,7 +3421,7 @@
           <a:p>
             <a:fld id="{E9CC885B-4903-4D54-9A93-00025F12DED9}" type="datetimeFigureOut">
               <a:rPr kumimoji="1" lang="ja-JP" altLang="en-US" smtClean="0"/>
-              <a:t>2024/12/17</a:t>
+              <a:t>2025/3/5</a:t>
             </a:fld>
             <a:endParaRPr kumimoji="1" lang="ja-JP" altLang="en-US"/>
           </a:p>
@@ -3696,7 +3696,7 @@
           <a:p>
             <a:fld id="{E9CC885B-4903-4D54-9A93-00025F12DED9}" type="datetimeFigureOut">
               <a:rPr kumimoji="1" lang="ja-JP" altLang="en-US" smtClean="0"/>
-              <a:t>2024/12/17</a:t>
+              <a:t>2025/3/5</a:t>
             </a:fld>
             <a:endParaRPr kumimoji="1" lang="ja-JP" altLang="en-US"/>
           </a:p>
@@ -4025,7 +4025,7 @@
           <a:p>
             <a:fld id="{E9CC885B-4903-4D54-9A93-00025F12DED9}" type="datetimeFigureOut">
               <a:rPr kumimoji="1" lang="ja-JP" altLang="en-US" smtClean="0"/>
-              <a:t>2024/12/17</a:t>
+              <a:t>2025/3/5</a:t>
             </a:fld>
             <a:endParaRPr kumimoji="1" lang="ja-JP" altLang="en-US"/>
           </a:p>
@@ -4501,7 +4501,7 @@
           <a:p>
             <a:fld id="{E9CC885B-4903-4D54-9A93-00025F12DED9}" type="datetimeFigureOut">
               <a:rPr kumimoji="1" lang="ja-JP" altLang="en-US" smtClean="0"/>
-              <a:t>2024/12/17</a:t>
+              <a:t>2025/3/5</a:t>
             </a:fld>
             <a:endParaRPr kumimoji="1" lang="ja-JP" altLang="en-US"/>
           </a:p>
@@ -4642,7 +4642,7 @@
           <a:p>
             <a:fld id="{E9CC885B-4903-4D54-9A93-00025F12DED9}" type="datetimeFigureOut">
               <a:rPr kumimoji="1" lang="ja-JP" altLang="en-US" smtClean="0"/>
-              <a:t>2024/12/17</a:t>
+              <a:t>2025/3/5</a:t>
             </a:fld>
             <a:endParaRPr kumimoji="1" lang="ja-JP" altLang="en-US"/>
           </a:p>
@@ -4755,7 +4755,7 @@
           <a:p>
             <a:fld id="{E9CC885B-4903-4D54-9A93-00025F12DED9}" type="datetimeFigureOut">
               <a:rPr kumimoji="1" lang="ja-JP" altLang="en-US" smtClean="0"/>
-              <a:t>2024/12/17</a:t>
+              <a:t>2025/3/5</a:t>
             </a:fld>
             <a:endParaRPr kumimoji="1" lang="ja-JP" altLang="en-US"/>
           </a:p>
@@ -5098,7 +5098,7 @@
           <a:p>
             <a:fld id="{E9CC885B-4903-4D54-9A93-00025F12DED9}" type="datetimeFigureOut">
               <a:rPr kumimoji="1" lang="ja-JP" altLang="en-US" smtClean="0"/>
-              <a:t>2024/12/17</a:t>
+              <a:t>2025/3/5</a:t>
             </a:fld>
             <a:endParaRPr kumimoji="1" lang="ja-JP" altLang="en-US"/>
           </a:p>
@@ -5386,7 +5386,7 @@
           <a:p>
             <a:fld id="{E9CC885B-4903-4D54-9A93-00025F12DED9}" type="datetimeFigureOut">
               <a:rPr kumimoji="1" lang="ja-JP" altLang="en-US" smtClean="0"/>
-              <a:t>2024/12/17</a:t>
+              <a:t>2025/3/5</a:t>
             </a:fld>
             <a:endParaRPr kumimoji="1" lang="ja-JP" altLang="en-US"/>
           </a:p>
@@ -5659,7 +5659,7 @@
           <a:p>
             <a:fld id="{E9CC885B-4903-4D54-9A93-00025F12DED9}" type="datetimeFigureOut">
               <a:rPr kumimoji="1" lang="ja-JP" altLang="en-US" smtClean="0"/>
-              <a:t>2024/12/17</a:t>
+              <a:t>2025/3/5</a:t>
             </a:fld>
             <a:endParaRPr kumimoji="1" lang="ja-JP" altLang="en-US"/>
           </a:p>
@@ -7984,8 +7984,8 @@
           </a:p>
         </p:txBody>
       </p:sp>
-      <mc:AlternateContent xmlns:mc="http://schemas.openxmlformats.org/markup-compatibility/2006">
-        <mc:Choice xmlns:a14="http://schemas.microsoft.com/office/drawing/2010/main" Requires="a14">
+      <mc:AlternateContent xmlns:mc="http://schemas.openxmlformats.org/markup-compatibility/2006" xmlns:a14="http://schemas.microsoft.com/office/drawing/2010/main">
+        <mc:Choice Requires="a14">
           <p:sp>
             <p:nvSpPr>
               <p:cNvPr id="6" name="テキスト ボックス 5">
@@ -9546,7 +9546,7 @@
             </p:txBody>
           </p:sp>
         </mc:Choice>
-        <mc:Fallback>
+        <mc:Fallback xmlns="">
           <p:sp>
             <p:nvSpPr>
               <p:cNvPr id="6" name="テキスト ボックス 5">
@@ -9661,8 +9661,8 @@
           </a:p>
         </p:txBody>
       </p:sp>
-      <mc:AlternateContent xmlns:mc="http://schemas.openxmlformats.org/markup-compatibility/2006">
-        <mc:Choice xmlns:a14="http://schemas.microsoft.com/office/drawing/2010/main" Requires="a14">
+      <mc:AlternateContent xmlns:mc="http://schemas.openxmlformats.org/markup-compatibility/2006" xmlns:a14="http://schemas.microsoft.com/office/drawing/2010/main">
+        <mc:Choice Requires="a14">
           <p:sp>
             <p:nvSpPr>
               <p:cNvPr id="6" name="テキスト ボックス 5">
@@ -10687,7 +10687,7 @@
             </p:txBody>
           </p:sp>
         </mc:Choice>
-        <mc:Fallback>
+        <mc:Fallback xmlns="">
           <p:sp>
             <p:nvSpPr>
               <p:cNvPr id="6" name="テキスト ボックス 5">

--- a/ゲーム科2年/00_前期/ゲーム開発Ⅰ/ゲーム物理学/座学/10_2次導関数と瞬間加速度.pptx
+++ b/ゲーム科2年/00_前期/ゲーム開発Ⅰ/ゲーム物理学/座学/10_2次導関数と瞬間加速度.pptx
@@ -2721,7 +2721,7 @@
           <a:p>
             <a:fld id="{E9CC885B-4903-4D54-9A93-00025F12DED9}" type="datetimeFigureOut">
               <a:rPr kumimoji="1" lang="ja-JP" altLang="en-US" smtClean="0"/>
-              <a:t>2025/3/5</a:t>
+              <a:t>2025/4/9</a:t>
             </a:fld>
             <a:endParaRPr kumimoji="1" lang="ja-JP" altLang="en-US"/>
           </a:p>
@@ -2951,7 +2951,7 @@
           <a:p>
             <a:fld id="{E9CC885B-4903-4D54-9A93-00025F12DED9}" type="datetimeFigureOut">
               <a:rPr kumimoji="1" lang="ja-JP" altLang="en-US" smtClean="0"/>
-              <a:t>2025/3/5</a:t>
+              <a:t>2025/4/9</a:t>
             </a:fld>
             <a:endParaRPr kumimoji="1" lang="ja-JP" altLang="en-US"/>
           </a:p>
@@ -3191,7 +3191,7 @@
           <a:p>
             <a:fld id="{E9CC885B-4903-4D54-9A93-00025F12DED9}" type="datetimeFigureOut">
               <a:rPr kumimoji="1" lang="ja-JP" altLang="en-US" smtClean="0"/>
-              <a:t>2025/3/5</a:t>
+              <a:t>2025/4/9</a:t>
             </a:fld>
             <a:endParaRPr kumimoji="1" lang="ja-JP" altLang="en-US"/>
           </a:p>
@@ -3421,7 +3421,7 @@
           <a:p>
             <a:fld id="{E9CC885B-4903-4D54-9A93-00025F12DED9}" type="datetimeFigureOut">
               <a:rPr kumimoji="1" lang="ja-JP" altLang="en-US" smtClean="0"/>
-              <a:t>2025/3/5</a:t>
+              <a:t>2025/4/9</a:t>
             </a:fld>
             <a:endParaRPr kumimoji="1" lang="ja-JP" altLang="en-US"/>
           </a:p>
@@ -3696,7 +3696,7 @@
           <a:p>
             <a:fld id="{E9CC885B-4903-4D54-9A93-00025F12DED9}" type="datetimeFigureOut">
               <a:rPr kumimoji="1" lang="ja-JP" altLang="en-US" smtClean="0"/>
-              <a:t>2025/3/5</a:t>
+              <a:t>2025/4/9</a:t>
             </a:fld>
             <a:endParaRPr kumimoji="1" lang="ja-JP" altLang="en-US"/>
           </a:p>
@@ -4025,7 +4025,7 @@
           <a:p>
             <a:fld id="{E9CC885B-4903-4D54-9A93-00025F12DED9}" type="datetimeFigureOut">
               <a:rPr kumimoji="1" lang="ja-JP" altLang="en-US" smtClean="0"/>
-              <a:t>2025/3/5</a:t>
+              <a:t>2025/4/9</a:t>
             </a:fld>
             <a:endParaRPr kumimoji="1" lang="ja-JP" altLang="en-US"/>
           </a:p>
@@ -4501,7 +4501,7 @@
           <a:p>
             <a:fld id="{E9CC885B-4903-4D54-9A93-00025F12DED9}" type="datetimeFigureOut">
               <a:rPr kumimoji="1" lang="ja-JP" altLang="en-US" smtClean="0"/>
-              <a:t>2025/3/5</a:t>
+              <a:t>2025/4/9</a:t>
             </a:fld>
             <a:endParaRPr kumimoji="1" lang="ja-JP" altLang="en-US"/>
           </a:p>
@@ -4642,7 +4642,7 @@
           <a:p>
             <a:fld id="{E9CC885B-4903-4D54-9A93-00025F12DED9}" type="datetimeFigureOut">
               <a:rPr kumimoji="1" lang="ja-JP" altLang="en-US" smtClean="0"/>
-              <a:t>2025/3/5</a:t>
+              <a:t>2025/4/9</a:t>
             </a:fld>
             <a:endParaRPr kumimoji="1" lang="ja-JP" altLang="en-US"/>
           </a:p>
@@ -4755,7 +4755,7 @@
           <a:p>
             <a:fld id="{E9CC885B-4903-4D54-9A93-00025F12DED9}" type="datetimeFigureOut">
               <a:rPr kumimoji="1" lang="ja-JP" altLang="en-US" smtClean="0"/>
-              <a:t>2025/3/5</a:t>
+              <a:t>2025/4/9</a:t>
             </a:fld>
             <a:endParaRPr kumimoji="1" lang="ja-JP" altLang="en-US"/>
           </a:p>
@@ -5098,7 +5098,7 @@
           <a:p>
             <a:fld id="{E9CC885B-4903-4D54-9A93-00025F12DED9}" type="datetimeFigureOut">
               <a:rPr kumimoji="1" lang="ja-JP" altLang="en-US" smtClean="0"/>
-              <a:t>2025/3/5</a:t>
+              <a:t>2025/4/9</a:t>
             </a:fld>
             <a:endParaRPr kumimoji="1" lang="ja-JP" altLang="en-US"/>
           </a:p>
@@ -5386,7 +5386,7 @@
           <a:p>
             <a:fld id="{E9CC885B-4903-4D54-9A93-00025F12DED9}" type="datetimeFigureOut">
               <a:rPr kumimoji="1" lang="ja-JP" altLang="en-US" smtClean="0"/>
-              <a:t>2025/3/5</a:t>
+              <a:t>2025/4/9</a:t>
             </a:fld>
             <a:endParaRPr kumimoji="1" lang="ja-JP" altLang="en-US"/>
           </a:p>
@@ -5659,7 +5659,7 @@
           <a:p>
             <a:fld id="{E9CC885B-4903-4D54-9A93-00025F12DED9}" type="datetimeFigureOut">
               <a:rPr kumimoji="1" lang="ja-JP" altLang="en-US" smtClean="0"/>
-              <a:t>2025/3/5</a:t>
+              <a:t>2025/4/9</a:t>
             </a:fld>
             <a:endParaRPr kumimoji="1" lang="ja-JP" altLang="en-US"/>
           </a:p>
@@ -6724,8 +6724,8 @@
           </a:p>
         </p:txBody>
       </p:sp>
-      <mc:AlternateContent xmlns:mc="http://schemas.openxmlformats.org/markup-compatibility/2006" xmlns:a14="http://schemas.microsoft.com/office/drawing/2010/main">
-        <mc:Choice Requires="a14">
+      <mc:AlternateContent xmlns:mc="http://schemas.openxmlformats.org/markup-compatibility/2006">
+        <mc:Choice xmlns:a14="http://schemas.microsoft.com/office/drawing/2010/main" Requires="a14">
           <p:sp>
             <p:nvSpPr>
               <p:cNvPr id="6" name="テキスト ボックス 5">
@@ -6741,7 +6741,7 @@
             <p:spPr>
               <a:xfrm>
                 <a:off x="567542" y="1216429"/>
-                <a:ext cx="10419840" cy="4893647"/>
+                <a:ext cx="10548657" cy="4893647"/>
               </a:xfrm>
               <a:prstGeom prst="rect">
                 <a:avLst/>
@@ -6786,10 +6786,10 @@
                 <a14:m>
                   <m:oMath xmlns:m="http://schemas.openxmlformats.org/officeDocument/2006/math">
                     <m:r>
-                      <a:rPr lang="en-US" altLang="ja-JP" sz="2400" b="0" i="1" smtClean="0">
+                      <a:rPr lang="en-US" altLang="ja-JP" sz="2400" i="1">
                         <a:latin typeface="Cambria Math" panose="02040503050406030204" pitchFamily="18" charset="0"/>
                       </a:rPr>
-                      <m:t>𝑓</m:t>
+                      <m:t>𝑣</m:t>
                     </m:r>
                     <m:r>
                       <a:rPr lang="en-US" altLang="ja-JP" sz="2400" b="0" i="1" smtClean="0">
@@ -6916,10 +6916,10 @@
                 <a14:m>
                   <m:oMath xmlns:m="http://schemas.openxmlformats.org/officeDocument/2006/math">
                     <m:r>
-                      <a:rPr lang="en-US" altLang="ja-JP" sz="2400" b="0" i="1" smtClean="0">
+                      <a:rPr lang="en-US" altLang="ja-JP" sz="2400" i="1">
                         <a:latin typeface="Cambria Math" panose="02040503050406030204" pitchFamily="18" charset="0"/>
                       </a:rPr>
-                      <m:t>𝑓</m:t>
+                      <m:t>𝑦</m:t>
                     </m:r>
                     <m:r>
                       <a:rPr lang="en-US" altLang="ja-JP" sz="2400" b="0" i="1" smtClean="0">
@@ -6971,7 +6971,7 @@
                         <a:rPr lang="en-US" altLang="ja-JP" sz="2400" b="0" i="1" smtClean="0">
                           <a:latin typeface="Cambria Math" panose="02040503050406030204" pitchFamily="18" charset="0"/>
                         </a:rPr>
-                        <m:t>𝑓</m:t>
+                        <m:t>𝑦</m:t>
                       </m:r>
                       <m:r>
                         <a:rPr lang="en-US" altLang="ja-JP" sz="2400" b="0" i="1" smtClean="0">
@@ -7029,7 +7029,7 @@
             </p:txBody>
           </p:sp>
         </mc:Choice>
-        <mc:Fallback xmlns="">
+        <mc:Fallback>
           <p:sp>
             <p:nvSpPr>
               <p:cNvPr id="6" name="テキスト ボックス 5">
@@ -7047,7 +7047,7 @@
             <p:spPr>
               <a:xfrm>
                 <a:off x="567542" y="1216429"/>
-                <a:ext cx="10419840" cy="4893647"/>
+                <a:ext cx="10548657" cy="4893647"/>
               </a:xfrm>
               <a:prstGeom prst="rect">
                 <a:avLst/>
@@ -7055,7 +7055,7 @@
               <a:blipFill>
                 <a:blip r:embed="rId2"/>
                 <a:stretch>
-                  <a:fillRect l="-878" t="-998" b="-1995"/>
+                  <a:fillRect l="-867" t="-998" b="-1995"/>
                 </a:stretch>
               </a:blipFill>
             </p:spPr>
@@ -7144,8 +7144,8 @@
           </a:p>
         </p:txBody>
       </p:sp>
-      <mc:AlternateContent xmlns:mc="http://schemas.openxmlformats.org/markup-compatibility/2006" xmlns:a14="http://schemas.microsoft.com/office/drawing/2010/main">
-        <mc:Choice Requires="a14">
+      <mc:AlternateContent xmlns:mc="http://schemas.openxmlformats.org/markup-compatibility/2006">
+        <mc:Choice xmlns:a14="http://schemas.microsoft.com/office/drawing/2010/main" Requires="a14">
           <p:sp>
             <p:nvSpPr>
               <p:cNvPr id="6" name="テキスト ボックス 5">
@@ -7192,7 +7192,7 @@
                       <a:rPr lang="en-US" altLang="ja-JP" sz="2400" b="0" i="1" smtClean="0">
                         <a:latin typeface="Cambria Math" panose="02040503050406030204" pitchFamily="18" charset="0"/>
                       </a:rPr>
-                      <m:t>𝑓</m:t>
+                      <m:t>𝑦</m:t>
                     </m:r>
                     <m:r>
                       <a:rPr lang="en-US" altLang="ja-JP" sz="2400" b="0" i="1" smtClean="0">
@@ -7349,7 +7349,7 @@
                         <a:rPr lang="en-US" altLang="ja-JP" sz="2400" b="0" i="1" smtClean="0">
                           <a:latin typeface="Cambria Math" panose="02040503050406030204" pitchFamily="18" charset="0"/>
                         </a:rPr>
-                        <m:t>𝑓</m:t>
+                        <m:t>𝑦</m:t>
                       </m:r>
                       <m:r>
                         <a:rPr lang="en-US" altLang="ja-JP" sz="2400" b="0" i="1" smtClean="0">
@@ -7426,7 +7426,7 @@
             </p:txBody>
           </p:sp>
         </mc:Choice>
-        <mc:Fallback xmlns="">
+        <mc:Fallback>
           <p:sp>
             <p:nvSpPr>
               <p:cNvPr id="6" name="テキスト ボックス 5">
@@ -7593,8 +7593,8 @@
           </a:p>
         </p:txBody>
       </p:sp>
-      <mc:AlternateContent xmlns:mc="http://schemas.openxmlformats.org/markup-compatibility/2006" xmlns:a14="http://schemas.microsoft.com/office/drawing/2010/main">
-        <mc:Choice Requires="a14">
+      <mc:AlternateContent xmlns:mc="http://schemas.openxmlformats.org/markup-compatibility/2006">
+        <mc:Choice xmlns:a14="http://schemas.microsoft.com/office/drawing/2010/main" Requires="a14">
           <p:sp>
             <p:nvSpPr>
               <p:cNvPr id="6" name="テキスト ボックス 5">
@@ -7745,7 +7745,7 @@
                         <a:rPr lang="en-US" altLang="ja-JP" sz="2400" b="0" i="1" smtClean="0">
                           <a:latin typeface="Cambria Math" panose="02040503050406030204" pitchFamily="18" charset="0"/>
                         </a:rPr>
-                        <m:t>𝑓</m:t>
+                        <m:t>𝑦</m:t>
                       </m:r>
                       <m:r>
                         <a:rPr lang="en-US" altLang="ja-JP" sz="2400" b="0" i="1" smtClean="0">
@@ -7830,7 +7830,7 @@
                       <a:rPr lang="en-US" altLang="ja-JP" sz="2400" b="0" i="1" smtClean="0">
                         <a:latin typeface="Cambria Math" panose="02040503050406030204" pitchFamily="18" charset="0"/>
                       </a:rPr>
-                      <m:t>𝑓</m:t>
+                      <m:t>𝑦</m:t>
                     </m:r>
                     <m:r>
                       <a:rPr lang="en-US" altLang="ja-JP" sz="2400" b="0" i="1" smtClean="0">
@@ -7869,7 +7869,7 @@
             </p:txBody>
           </p:sp>
         </mc:Choice>
-        <mc:Fallback xmlns="">
+        <mc:Fallback>
           <p:sp>
             <p:nvSpPr>
               <p:cNvPr id="6" name="テキスト ボックス 5">

--- a/ゲーム科2年/00_前期/ゲーム開発Ⅰ/ゲーム物理学/座学/10_2次導関数と瞬間加速度.pptx
+++ b/ゲーム科2年/00_前期/ゲーム開発Ⅰ/ゲーム物理学/座学/10_2次導関数と瞬間加速度.pptx
@@ -2721,7 +2721,7 @@
           <a:p>
             <a:fld id="{E9CC885B-4903-4D54-9A93-00025F12DED9}" type="datetimeFigureOut">
               <a:rPr kumimoji="1" lang="ja-JP" altLang="en-US" smtClean="0"/>
-              <a:t>2025/4/9</a:t>
+              <a:t>2025/7/18</a:t>
             </a:fld>
             <a:endParaRPr kumimoji="1" lang="ja-JP" altLang="en-US"/>
           </a:p>
@@ -2951,7 +2951,7 @@
           <a:p>
             <a:fld id="{E9CC885B-4903-4D54-9A93-00025F12DED9}" type="datetimeFigureOut">
               <a:rPr kumimoji="1" lang="ja-JP" altLang="en-US" smtClean="0"/>
-              <a:t>2025/4/9</a:t>
+              <a:t>2025/7/18</a:t>
             </a:fld>
             <a:endParaRPr kumimoji="1" lang="ja-JP" altLang="en-US"/>
           </a:p>
@@ -3191,7 +3191,7 @@
           <a:p>
             <a:fld id="{E9CC885B-4903-4D54-9A93-00025F12DED9}" type="datetimeFigureOut">
               <a:rPr kumimoji="1" lang="ja-JP" altLang="en-US" smtClean="0"/>
-              <a:t>2025/4/9</a:t>
+              <a:t>2025/7/18</a:t>
             </a:fld>
             <a:endParaRPr kumimoji="1" lang="ja-JP" altLang="en-US"/>
           </a:p>
@@ -3421,7 +3421,7 @@
           <a:p>
             <a:fld id="{E9CC885B-4903-4D54-9A93-00025F12DED9}" type="datetimeFigureOut">
               <a:rPr kumimoji="1" lang="ja-JP" altLang="en-US" smtClean="0"/>
-              <a:t>2025/4/9</a:t>
+              <a:t>2025/7/18</a:t>
             </a:fld>
             <a:endParaRPr kumimoji="1" lang="ja-JP" altLang="en-US"/>
           </a:p>
@@ -3696,7 +3696,7 @@
           <a:p>
             <a:fld id="{E9CC885B-4903-4D54-9A93-00025F12DED9}" type="datetimeFigureOut">
               <a:rPr kumimoji="1" lang="ja-JP" altLang="en-US" smtClean="0"/>
-              <a:t>2025/4/9</a:t>
+              <a:t>2025/7/18</a:t>
             </a:fld>
             <a:endParaRPr kumimoji="1" lang="ja-JP" altLang="en-US"/>
           </a:p>
@@ -4025,7 +4025,7 @@
           <a:p>
             <a:fld id="{E9CC885B-4903-4D54-9A93-00025F12DED9}" type="datetimeFigureOut">
               <a:rPr kumimoji="1" lang="ja-JP" altLang="en-US" smtClean="0"/>
-              <a:t>2025/4/9</a:t>
+              <a:t>2025/7/18</a:t>
             </a:fld>
             <a:endParaRPr kumimoji="1" lang="ja-JP" altLang="en-US"/>
           </a:p>
@@ -4501,7 +4501,7 @@
           <a:p>
             <a:fld id="{E9CC885B-4903-4D54-9A93-00025F12DED9}" type="datetimeFigureOut">
               <a:rPr kumimoji="1" lang="ja-JP" altLang="en-US" smtClean="0"/>
-              <a:t>2025/4/9</a:t>
+              <a:t>2025/7/18</a:t>
             </a:fld>
             <a:endParaRPr kumimoji="1" lang="ja-JP" altLang="en-US"/>
           </a:p>
@@ -4642,7 +4642,7 @@
           <a:p>
             <a:fld id="{E9CC885B-4903-4D54-9A93-00025F12DED9}" type="datetimeFigureOut">
               <a:rPr kumimoji="1" lang="ja-JP" altLang="en-US" smtClean="0"/>
-              <a:t>2025/4/9</a:t>
+              <a:t>2025/7/18</a:t>
             </a:fld>
             <a:endParaRPr kumimoji="1" lang="ja-JP" altLang="en-US"/>
           </a:p>
@@ -4755,7 +4755,7 @@
           <a:p>
             <a:fld id="{E9CC885B-4903-4D54-9A93-00025F12DED9}" type="datetimeFigureOut">
               <a:rPr kumimoji="1" lang="ja-JP" altLang="en-US" smtClean="0"/>
-              <a:t>2025/4/9</a:t>
+              <a:t>2025/7/18</a:t>
             </a:fld>
             <a:endParaRPr kumimoji="1" lang="ja-JP" altLang="en-US"/>
           </a:p>
@@ -5098,7 +5098,7 @@
           <a:p>
             <a:fld id="{E9CC885B-4903-4D54-9A93-00025F12DED9}" type="datetimeFigureOut">
               <a:rPr kumimoji="1" lang="ja-JP" altLang="en-US" smtClean="0"/>
-              <a:t>2025/4/9</a:t>
+              <a:t>2025/7/18</a:t>
             </a:fld>
             <a:endParaRPr kumimoji="1" lang="ja-JP" altLang="en-US"/>
           </a:p>
@@ -5386,7 +5386,7 @@
           <a:p>
             <a:fld id="{E9CC885B-4903-4D54-9A93-00025F12DED9}" type="datetimeFigureOut">
               <a:rPr kumimoji="1" lang="ja-JP" altLang="en-US" smtClean="0"/>
-              <a:t>2025/4/9</a:t>
+              <a:t>2025/7/18</a:t>
             </a:fld>
             <a:endParaRPr kumimoji="1" lang="ja-JP" altLang="en-US"/>
           </a:p>
@@ -5659,7 +5659,7 @@
           <a:p>
             <a:fld id="{E9CC885B-4903-4D54-9A93-00025F12DED9}" type="datetimeFigureOut">
               <a:rPr kumimoji="1" lang="ja-JP" altLang="en-US" smtClean="0"/>
-              <a:t>2025/4/9</a:t>
+              <a:t>2025/7/18</a:t>
             </a:fld>
             <a:endParaRPr kumimoji="1" lang="ja-JP" altLang="en-US"/>
           </a:p>
@@ -6724,8 +6724,8 @@
           </a:p>
         </p:txBody>
       </p:sp>
-      <mc:AlternateContent xmlns:mc="http://schemas.openxmlformats.org/markup-compatibility/2006">
-        <mc:Choice xmlns:a14="http://schemas.microsoft.com/office/drawing/2010/main" Requires="a14">
+      <mc:AlternateContent xmlns:mc="http://schemas.openxmlformats.org/markup-compatibility/2006" xmlns:a14="http://schemas.microsoft.com/office/drawing/2010/main">
+        <mc:Choice Requires="a14">
           <p:sp>
             <p:nvSpPr>
               <p:cNvPr id="6" name="テキスト ボックス 5">
@@ -7029,7 +7029,7 @@
             </p:txBody>
           </p:sp>
         </mc:Choice>
-        <mc:Fallback>
+        <mc:Fallback xmlns="">
           <p:sp>
             <p:nvSpPr>
               <p:cNvPr id="6" name="テキスト ボックス 5">
@@ -7144,8 +7144,8 @@
           </a:p>
         </p:txBody>
       </p:sp>
-      <mc:AlternateContent xmlns:mc="http://schemas.openxmlformats.org/markup-compatibility/2006">
-        <mc:Choice xmlns:a14="http://schemas.microsoft.com/office/drawing/2010/main" Requires="a14">
+      <mc:AlternateContent xmlns:mc="http://schemas.openxmlformats.org/markup-compatibility/2006" xmlns:a14="http://schemas.microsoft.com/office/drawing/2010/main">
+        <mc:Choice Requires="a14">
           <p:sp>
             <p:nvSpPr>
               <p:cNvPr id="6" name="テキスト ボックス 5">
@@ -7426,7 +7426,7 @@
             </p:txBody>
           </p:sp>
         </mc:Choice>
-        <mc:Fallback>
+        <mc:Fallback xmlns="">
           <p:sp>
             <p:nvSpPr>
               <p:cNvPr id="6" name="テキスト ボックス 5">
@@ -7593,8 +7593,8 @@
           </a:p>
         </p:txBody>
       </p:sp>
-      <mc:AlternateContent xmlns:mc="http://schemas.openxmlformats.org/markup-compatibility/2006">
-        <mc:Choice xmlns:a14="http://schemas.microsoft.com/office/drawing/2010/main" Requires="a14">
+      <mc:AlternateContent xmlns:mc="http://schemas.openxmlformats.org/markup-compatibility/2006" xmlns:a14="http://schemas.microsoft.com/office/drawing/2010/main">
+        <mc:Choice Requires="a14">
           <p:sp>
             <p:nvSpPr>
               <p:cNvPr id="6" name="テキスト ボックス 5">
@@ -7869,7 +7869,7 @@
             </p:txBody>
           </p:sp>
         </mc:Choice>
-        <mc:Fallback>
+        <mc:Fallback xmlns="">
           <p:sp>
             <p:nvSpPr>
               <p:cNvPr id="6" name="テキスト ボックス 5">
@@ -14582,8 +14582,8 @@
           </a:p>
         </p:txBody>
       </p:sp>
-      <mc:AlternateContent xmlns:mc="http://schemas.openxmlformats.org/markup-compatibility/2006" xmlns:a14="http://schemas.microsoft.com/office/drawing/2010/main">
-        <mc:Choice Requires="a14">
+      <mc:AlternateContent xmlns:mc="http://schemas.openxmlformats.org/markup-compatibility/2006">
+        <mc:Choice xmlns:a14="http://schemas.microsoft.com/office/drawing/2010/main" Requires="a14">
           <p:sp>
             <p:nvSpPr>
               <p:cNvPr id="6" name="テキスト ボックス 5">
@@ -15113,6 +15113,12 @@
                               <a:rPr lang="en-US" altLang="ja-JP" sz="2400" b="0" i="1" smtClean="0">
                                 <a:latin typeface="Cambria Math" panose="02040503050406030204" pitchFamily="18" charset="0"/>
                               </a:rPr>
+                              <m:t>(</m:t>
+                            </m:r>
+                            <m:r>
+                              <a:rPr lang="en-US" altLang="ja-JP" sz="2400" b="0" i="1" smtClean="0">
+                                <a:latin typeface="Cambria Math" panose="02040503050406030204" pitchFamily="18" charset="0"/>
+                              </a:rPr>
                               <m:t>−29.4−9.8</m:t>
                             </m:r>
                             <m:r>
@@ -15283,7 +15289,7 @@
             </p:txBody>
           </p:sp>
         </mc:Choice>
-        <mc:Fallback xmlns="">
+        <mc:Fallback>
           <p:sp>
             <p:nvSpPr>
               <p:cNvPr id="6" name="テキスト ボックス 5">

--- a/ゲーム科2年/00_前期/ゲーム開発Ⅰ/ゲーム物理学/座学/10_2次導関数と瞬間加速度.pptx
+++ b/ゲーム科2年/00_前期/ゲーム開発Ⅰ/ゲーム物理学/座学/10_2次導関数と瞬間加速度.pptx
@@ -2721,7 +2721,7 @@
           <a:p>
             <a:fld id="{E9CC885B-4903-4D54-9A93-00025F12DED9}" type="datetimeFigureOut">
               <a:rPr kumimoji="1" lang="ja-JP" altLang="en-US" smtClean="0"/>
-              <a:t>2025/7/18</a:t>
+              <a:t>2025/9/19</a:t>
             </a:fld>
             <a:endParaRPr kumimoji="1" lang="ja-JP" altLang="en-US"/>
           </a:p>
@@ -2951,7 +2951,7 @@
           <a:p>
             <a:fld id="{E9CC885B-4903-4D54-9A93-00025F12DED9}" type="datetimeFigureOut">
               <a:rPr kumimoji="1" lang="ja-JP" altLang="en-US" smtClean="0"/>
-              <a:t>2025/7/18</a:t>
+              <a:t>2025/9/19</a:t>
             </a:fld>
             <a:endParaRPr kumimoji="1" lang="ja-JP" altLang="en-US"/>
           </a:p>
@@ -3191,7 +3191,7 @@
           <a:p>
             <a:fld id="{E9CC885B-4903-4D54-9A93-00025F12DED9}" type="datetimeFigureOut">
               <a:rPr kumimoji="1" lang="ja-JP" altLang="en-US" smtClean="0"/>
-              <a:t>2025/7/18</a:t>
+              <a:t>2025/9/19</a:t>
             </a:fld>
             <a:endParaRPr kumimoji="1" lang="ja-JP" altLang="en-US"/>
           </a:p>
@@ -3421,7 +3421,7 @@
           <a:p>
             <a:fld id="{E9CC885B-4903-4D54-9A93-00025F12DED9}" type="datetimeFigureOut">
               <a:rPr kumimoji="1" lang="ja-JP" altLang="en-US" smtClean="0"/>
-              <a:t>2025/7/18</a:t>
+              <a:t>2025/9/19</a:t>
             </a:fld>
             <a:endParaRPr kumimoji="1" lang="ja-JP" altLang="en-US"/>
           </a:p>
@@ -3696,7 +3696,7 @@
           <a:p>
             <a:fld id="{E9CC885B-4903-4D54-9A93-00025F12DED9}" type="datetimeFigureOut">
               <a:rPr kumimoji="1" lang="ja-JP" altLang="en-US" smtClean="0"/>
-              <a:t>2025/7/18</a:t>
+              <a:t>2025/9/19</a:t>
             </a:fld>
             <a:endParaRPr kumimoji="1" lang="ja-JP" altLang="en-US"/>
           </a:p>
@@ -4025,7 +4025,7 @@
           <a:p>
             <a:fld id="{E9CC885B-4903-4D54-9A93-00025F12DED9}" type="datetimeFigureOut">
               <a:rPr kumimoji="1" lang="ja-JP" altLang="en-US" smtClean="0"/>
-              <a:t>2025/7/18</a:t>
+              <a:t>2025/9/19</a:t>
             </a:fld>
             <a:endParaRPr kumimoji="1" lang="ja-JP" altLang="en-US"/>
           </a:p>
@@ -4501,7 +4501,7 @@
           <a:p>
             <a:fld id="{E9CC885B-4903-4D54-9A93-00025F12DED9}" type="datetimeFigureOut">
               <a:rPr kumimoji="1" lang="ja-JP" altLang="en-US" smtClean="0"/>
-              <a:t>2025/7/18</a:t>
+              <a:t>2025/9/19</a:t>
             </a:fld>
             <a:endParaRPr kumimoji="1" lang="ja-JP" altLang="en-US"/>
           </a:p>
@@ -4642,7 +4642,7 @@
           <a:p>
             <a:fld id="{E9CC885B-4903-4D54-9A93-00025F12DED9}" type="datetimeFigureOut">
               <a:rPr kumimoji="1" lang="ja-JP" altLang="en-US" smtClean="0"/>
-              <a:t>2025/7/18</a:t>
+              <a:t>2025/9/19</a:t>
             </a:fld>
             <a:endParaRPr kumimoji="1" lang="ja-JP" altLang="en-US"/>
           </a:p>
@@ -4755,7 +4755,7 @@
           <a:p>
             <a:fld id="{E9CC885B-4903-4D54-9A93-00025F12DED9}" type="datetimeFigureOut">
               <a:rPr kumimoji="1" lang="ja-JP" altLang="en-US" smtClean="0"/>
-              <a:t>2025/7/18</a:t>
+              <a:t>2025/9/19</a:t>
             </a:fld>
             <a:endParaRPr kumimoji="1" lang="ja-JP" altLang="en-US"/>
           </a:p>
@@ -5098,7 +5098,7 @@
           <a:p>
             <a:fld id="{E9CC885B-4903-4D54-9A93-00025F12DED9}" type="datetimeFigureOut">
               <a:rPr kumimoji="1" lang="ja-JP" altLang="en-US" smtClean="0"/>
-              <a:t>2025/7/18</a:t>
+              <a:t>2025/9/19</a:t>
             </a:fld>
             <a:endParaRPr kumimoji="1" lang="ja-JP" altLang="en-US"/>
           </a:p>
@@ -5386,7 +5386,7 @@
           <a:p>
             <a:fld id="{E9CC885B-4903-4D54-9A93-00025F12DED9}" type="datetimeFigureOut">
               <a:rPr kumimoji="1" lang="ja-JP" altLang="en-US" smtClean="0"/>
-              <a:t>2025/7/18</a:t>
+              <a:t>2025/9/19</a:t>
             </a:fld>
             <a:endParaRPr kumimoji="1" lang="ja-JP" altLang="en-US"/>
           </a:p>
@@ -5659,7 +5659,7 @@
           <a:p>
             <a:fld id="{E9CC885B-4903-4D54-9A93-00025F12DED9}" type="datetimeFigureOut">
               <a:rPr kumimoji="1" lang="ja-JP" altLang="en-US" smtClean="0"/>
-              <a:t>2025/7/18</a:t>
+              <a:t>2025/9/19</a:t>
             </a:fld>
             <a:endParaRPr kumimoji="1" lang="ja-JP" altLang="en-US"/>
           </a:p>
@@ -7984,8 +7984,8 @@
           </a:p>
         </p:txBody>
       </p:sp>
-      <mc:AlternateContent xmlns:mc="http://schemas.openxmlformats.org/markup-compatibility/2006" xmlns:a14="http://schemas.microsoft.com/office/drawing/2010/main">
-        <mc:Choice Requires="a14">
+      <mc:AlternateContent xmlns:mc="http://schemas.openxmlformats.org/markup-compatibility/2006">
+        <mc:Choice xmlns:a14="http://schemas.microsoft.com/office/drawing/2010/main" Requires="a14">
           <p:sp>
             <p:nvSpPr>
               <p:cNvPr id="6" name="テキスト ボックス 5">
@@ -8145,7 +8145,19 @@
                 </a14:m>
                 <a:r>
                   <a:rPr lang="ja-JP" altLang="en-US" sz="2400" dirty="0"/>
-                  <a:t>における瞬間加速度を求めなさい。</a:t>
+                  <a:t>における</a:t>
+                </a:r>
+                <a:r>
+                  <a:rPr lang="ja-JP" altLang="en-US" sz="2400" b="1" dirty="0">
+                    <a:solidFill>
+                      <a:srgbClr val="FF0000"/>
+                    </a:solidFill>
+                  </a:rPr>
+                  <a:t>瞬間加速度</a:t>
+                </a:r>
+                <a:r>
+                  <a:rPr lang="ja-JP" altLang="en-US" sz="2400" dirty="0"/>
+                  <a:t>を求めなさい。</a:t>
                 </a:r>
                 <a:endParaRPr lang="en-US" altLang="ja-JP" sz="2400" dirty="0"/>
               </a:p>
@@ -9546,7 +9558,7 @@
             </p:txBody>
           </p:sp>
         </mc:Choice>
-        <mc:Fallback xmlns="">
+        <mc:Fallback>
           <p:sp>
             <p:nvSpPr>
               <p:cNvPr id="6" name="テキスト ボックス 5">
@@ -14582,8 +14594,8 @@
           </a:p>
         </p:txBody>
       </p:sp>
-      <mc:AlternateContent xmlns:mc="http://schemas.openxmlformats.org/markup-compatibility/2006">
-        <mc:Choice xmlns:a14="http://schemas.microsoft.com/office/drawing/2010/main" Requires="a14">
+      <mc:AlternateContent xmlns:mc="http://schemas.openxmlformats.org/markup-compatibility/2006" xmlns:a14="http://schemas.microsoft.com/office/drawing/2010/main">
+        <mc:Choice Requires="a14">
           <p:sp>
             <p:nvSpPr>
               <p:cNvPr id="6" name="テキスト ボックス 5">
@@ -15113,13 +15125,7 @@
                               <a:rPr lang="en-US" altLang="ja-JP" sz="2400" b="0" i="1" smtClean="0">
                                 <a:latin typeface="Cambria Math" panose="02040503050406030204" pitchFamily="18" charset="0"/>
                               </a:rPr>
-                              <m:t>(</m:t>
-                            </m:r>
-                            <m:r>
-                              <a:rPr lang="en-US" altLang="ja-JP" sz="2400" b="0" i="1" smtClean="0">
-                                <a:latin typeface="Cambria Math" panose="02040503050406030204" pitchFamily="18" charset="0"/>
-                              </a:rPr>
-                              <m:t>−29.4−9.8</m:t>
+                              <m:t>(−29.4−9.8</m:t>
                             </m:r>
                             <m:r>
                               <a:rPr lang="en-US" altLang="ja-JP" sz="2400" b="0" i="1" smtClean="0">
@@ -15289,7 +15295,7 @@
             </p:txBody>
           </p:sp>
         </mc:Choice>
-        <mc:Fallback>
+        <mc:Fallback xmlns="">
           <p:sp>
             <p:nvSpPr>
               <p:cNvPr id="6" name="テキスト ボックス 5">
